--- a/dist/초6/수학/입체와측정/초6_수학_입체와측정_03_쌓기나무와공간감각.pptx
+++ b/dist/초6/수학/입체와측정/초6_수학_입체와측정_03_쌓기나무와공간감각.pptx
@@ -121,13 +121,13 @@
   <p:extLst>
     <p:ext uri="{521415D9-36F7-43E2-AB2F-B90AF26B5E84}">
       <p14:sectionLst xmlns:p14="http://schemas.microsoft.com/office/powerpoint/2010/main">
-        <p14:section name="도입" id="{d811248e-460f-974b-c90e-efc5187f4392}">
+        <p14:section name="도입" id="{9b974e5a-c590-de18-1f59-a03eae4c87f7}">
           <p14:sldIdLst>
             <p14:sldId id="256"/>
             <p14:sldId id="257"/>
           </p14:sldIdLst>
         </p14:section>
-        <p14:section name="개념" id="{d73c0cec-7901-6c19-4e5d-6e9384e34ab9}">
+        <p14:section name="개념" id="{741fd81b-f280-c78b-697d-8c20c24faf68}">
           <p14:sldIdLst>
             <p14:sldId id="258"/>
             <p14:sldId id="260"/>
@@ -135,7 +135,7 @@
             <p14:sldId id="262"/>
           </p14:sldIdLst>
         </p14:section>
-        <p14:section name="연습" id="{4279b225-af4d-eaa3-995a-7fe35cdb5141}">
+        <p14:section name="연습" id="{d12c9357-114a-2f7f-46ec-fbd584205abc}">
           <p14:sldIdLst>
             <p14:sldId id="259"/>
             <p14:sldId id="263"/>
@@ -143,25 +143,25 @@
             <p14:sldId id="265"/>
           </p14:sldIdLst>
         </p14:section>
-        <p14:section name="개념" id="{a1f83bc6-89f8-ac9c-025a-32a7d2c54005}">
+        <p14:section name="개념" id="{47a89693-5d13-76df-3d84-a54fec9cff42}">
           <p14:sldIdLst/>
         </p14:section>
-        <p14:section name="연습" id="{a7eb34ab-8d7f-efbc-1b55-3531b567d2bd}">
+        <p14:section name="연습" id="{5598c358-9b6b-0cff-283c-2a5882240fa3}">
           <p14:sldIdLst/>
         </p14:section>
-        <p14:section name="확인" id="{07d56c02-5bf9-a13d-3628-a4b1c70bc05c}">
+        <p14:section name="확인" id="{0f423cac-52d9-e130-f904-30aac8a5e359}">
           <p14:sldIdLst>
             <p14:sldId id="266"/>
             <p14:sldId id="267"/>
             <p14:sldId id="268"/>
           </p14:sldIdLst>
         </p14:section>
-        <p14:section name="정리" id="{4e679eec-a05d-5ba4-343d-83fde6ee9b52}">
+        <p14:section name="정리" id="{ffa3ff5a-388d-7cca-2470-ae21641deabc}">
           <p14:sldIdLst>
             <p14:sldId id="269"/>
           </p14:sldIdLst>
         </p14:section>
-        <p14:section name="보충" id="{be133607-d352-ca46-9a22-d1175245ba45}">
+        <p14:section name="보충" id="{ed9ead85-f846-5f14-01ba-186eec6e331d}">
           <p14:sldIdLst>
             <p14:sldId id="270"/>
           </p14:sldIdLst>
